--- a/docs/Review3/SafeScape_Review3.pptx
+++ b/docs/Review3/SafeScape_Review3.pptx
@@ -42366,7 +42366,7 @@
                           </a:solidFill>
                           <a:latin typeface="Calibri"/>
                         </a:rPr>
-                        <a:t>0.853</a:t>
+                        <a:t>0.852</a:t>
                       </a:r>
                     </a:p>
                   </a:txBody>
@@ -42388,7 +42388,7 @@
                           </a:solidFill>
                           <a:latin typeface="Calibri"/>
                         </a:rPr>
-                        <a:t>86.5%</a:t>
+                        <a:t>86.7%</a:t>
                       </a:r>
                     </a:p>
                   </a:txBody>
@@ -42454,7 +42454,7 @@
                           </a:solidFill>
                           <a:latin typeface="Calibri"/>
                         </a:rPr>
-                        <a:t>6.90 ms</a:t>
+                        <a:t>12.81 ms</a:t>
                       </a:r>
                     </a:p>
                   </a:txBody>
@@ -42721,7 +42721,7 @@
                 </a:solidFill>
                 <a:latin typeface="Calibri"/>
               </a:rPr>
-              <a:t>▪  CRNN leads every quality metric: macro-F1 0.853 vs 0.774 / 0.725</a:t>
+              <a:t>▪  CRNN leads every quality metric: macro-F1 0.852 vs 0.774 / 0.725</a:t>
             </a:r>
           </a:p>
           <a:p>
@@ -42737,7 +42737,7 @@
                 </a:solidFill>
                 <a:latin typeface="Calibri"/>
               </a:rPr>
-              <a:t>▪  Transformer: 17% of the CRNN's parameters, 14× faster per window</a:t>
+              <a:t>▪  Transformer: 17% of the CRNN's parameters, 27× faster per window</a:t>
             </a:r>
           </a:p>
           <a:p>
@@ -43257,7 +43257,7 @@
                           </a:solidFill>
                           <a:latin typeface="Calibri"/>
                         </a:rPr>
-                        <a:t>0.87</a:t>
+                        <a:t>0.88</a:t>
                       </a:r>
                     </a:p>
                   </a:txBody>
@@ -43435,7 +43435,7 @@
                           </a:solidFill>
                           <a:latin typeface="Calibri"/>
                         </a:rPr>
-                        <a:t>0.69</a:t>
+                        <a:t>0.68</a:t>
                       </a:r>
                     </a:p>
                   </a:txBody>
@@ -43479,7 +43479,7 @@
                           </a:solidFill>
                           <a:latin typeface="Calibri"/>
                         </a:rPr>
-                        <a:t>0.69</a:t>
+                        <a:t>0.68</a:t>
                       </a:r>
                     </a:p>
                   </a:txBody>
@@ -44276,7 +44276,7 @@
                 </a:solidFill>
                 <a:latin typeface="Calibri"/>
               </a:rPr>
-              <a:t>▪  glass_break separates the models most (F1 0.43 / 0.69 / 0.49): a transient of a few hundred ms that the CRNN's time axis catches and pooling blurs</a:t>
+              <a:t>▪  glass_break separates the models most (F1 0.43 / 0.68 / 0.49): a transient of a few hundred ms that the CRNN's time axis catches and pooling blurs</a:t>
             </a:r>
           </a:p>
           <a:p>
@@ -44464,7 +44464,7 @@
       </p:sp>
       <p:pic>
         <p:nvPicPr>
-          <p:cNvPr id="6" name="Picture 5" descr="logmel_crnn_v2_leakfree_confusion_matrix.png"/>
+          <p:cNvPr id="6" name="Picture 5" descr="logmel_crnn_v2_int8_leakfree_confusion_matrix.png"/>
           <p:cNvPicPr>
             <a:picLocks noChangeAspect="1"/>
           </p:cNvPicPr>

--- a/docs/Review3/SafeScape_Review3.pptx
+++ b/docs/Review3/SafeScape_Review3.pptx
@@ -39226,7 +39226,7 @@
                 </a:solidFill>
                 <a:latin typeface="Calibri"/>
               </a:rPr>
-              <a:t>▪  Ambience followed by silence reads as distress_call — likely per-window normalisation, not yet confirmed</a:t>
+              <a:t>▪  A quiet training-set ambience clip padded with silence read as distress_call (held-out clip passes) — likely per-window normalisation, not yet confirmed</a:t>
             </a:r>
           </a:p>
           <a:p>
@@ -41133,7 +41133,7 @@
                           </a:solidFill>
                           <a:latin typeface="Calibri"/>
                         </a:rPr>
-                        <a:t>Hazard in first or second half of a clip</a:t>
+                        <a:t>Sound in first or second half of a clip</a:t>
                       </a:r>
                     </a:p>
                   </a:txBody>
@@ -41155,7 +41155,7 @@
                           </a:solidFill>
                           <a:latin typeface="Calibri"/>
                         </a:rPr>
-                        <a:t>detected</a:t>
+                        <a:t>same class either way</a:t>
                       </a:r>
                     </a:p>
                   </a:txBody>
@@ -41177,7 +41177,7 @@
                           </a:solidFill>
                           <a:latin typeface="Calibri"/>
                         </a:rPr>
-                        <a:t>pass — all 4 hazard classes</a:t>
+                        <a:t>pass — all 5 classes</a:t>
                       </a:r>
                     </a:p>
                   </a:txBody>
@@ -41201,7 +41201,7 @@
                           </a:solidFill>
                           <a:latin typeface="Calibri"/>
                         </a:rPr>
-                        <a:t>Ambience followed by 1 s of silence</a:t>
+                        <a:t>2 s of silence</a:t>
                       </a:r>
                     </a:p>
                   </a:txBody>
@@ -41223,7 +41223,7 @@
                           </a:solidFill>
                           <a:latin typeface="Calibri"/>
                         </a:rPr>
-                        <a:t>ambience</a:t>
+                        <a:t>ambience, every model</a:t>
                       </a:r>
                     </a:p>
                   </a:txBody>
@@ -41245,7 +41245,7 @@
                           </a:solidFill>
                           <a:latin typeface="Calibri"/>
                         </a:rPr>
-                        <a:t>fail — distress_call 0.77 (same with the earlier model; pre-processing)</a:t>
+                        <a:t>pass — energy gate</a:t>
                       </a:r>
                     </a:p>
                   </a:txBody>
@@ -41269,7 +41269,7 @@
                           </a:solidFill>
                           <a:latin typeface="Calibri"/>
                         </a:rPr>
-                        <a:t>2 s of silence</a:t>
+                        <a:t>0.33 s clip</a:t>
                       </a:r>
                     </a:p>
                   </a:txBody>
@@ -41291,7 +41291,7 @@
                           </a:solidFill>
                           <a:latin typeface="Calibri"/>
                         </a:rPr>
-                        <a:t>ambience, every model</a:t>
+                        <a:t>every model answers</a:t>
                       </a:r>
                     </a:p>
                   </a:txBody>
@@ -41313,7 +41313,7 @@
                           </a:solidFill>
                           <a:latin typeface="Calibri"/>
                         </a:rPr>
-                        <a:t>pass — energy gate</a:t>
+                        <a:t>pass — zero-padded window</a:t>
                       </a:r>
                     </a:p>
                   </a:txBody>
@@ -41337,7 +41337,7 @@
                           </a:solidFill>
                           <a:latin typeface="Calibri"/>
                         </a:rPr>
-                        <a:t>0.33 s clip</a:t>
+                        <a:t>Unknown model key</a:t>
                       </a:r>
                     </a:p>
                   </a:txBody>
@@ -41359,7 +41359,7 @@
                           </a:solidFill>
                           <a:latin typeface="Calibri"/>
                         </a:rPr>
-                        <a:t>every model answers</a:t>
+                        <a:t>HTTP 404, server stays up</a:t>
                       </a:r>
                     </a:p>
                   </a:txBody>
@@ -41381,7 +41381,7 @@
                           </a:solidFill>
                           <a:latin typeface="Calibri"/>
                         </a:rPr>
-                        <a:t>pass — zero-padded window</a:t>
+                        <a:t>pass</a:t>
                       </a:r>
                     </a:p>
                   </a:txBody>
@@ -41405,7 +41405,7 @@
                           </a:solidFill>
                           <a:latin typeface="Calibri"/>
                         </a:rPr>
-                        <a:t>Unknown model key</a:t>
+                        <a:t>No microphone access (LAN http)</a:t>
                       </a:r>
                     </a:p>
                   </a:txBody>
@@ -41427,7 +41427,7 @@
                           </a:solidFill>
                           <a:latin typeface="Calibri"/>
                         </a:rPr>
-                        <a:t>HTTP 404, server stays up</a:t>
+                        <a:t>record disabled with reason</a:t>
                       </a:r>
                     </a:p>
                   </a:txBody>
@@ -41449,7 +41449,7 @@
                           </a:solidFill>
                           <a:latin typeface="Calibri"/>
                         </a:rPr>
-                        <a:t>pass</a:t>
+                        <a:t>pass — upload/test clips still work</a:t>
                       </a:r>
                     </a:p>
                   </a:txBody>
@@ -41473,7 +41473,7 @@
                           </a:solidFill>
                           <a:latin typeface="Calibri"/>
                         </a:rPr>
-                        <a:t>No microphone access (LAN http)</a:t>
+                        <a:t>Existing mobile app on the new server</a:t>
                       </a:r>
                     </a:p>
                   </a:txBody>
@@ -41495,7 +41495,7 @@
                           </a:solidFill>
                           <a:latin typeface="Calibri"/>
                         </a:rPr>
-                        <a:t>record disabled with reason</a:t>
+                        <a:t>unchanged</a:t>
                       </a:r>
                     </a:p>
                   </a:txBody>
@@ -41517,7 +41517,7 @@
                           </a:solidFill>
                           <a:latin typeface="Calibri"/>
                         </a:rPr>
-                        <a:t>pass — upload/test clips still work</a:t>
+                        <a:t>pass — server/test_client.py</a:t>
                       </a:r>
                     </a:p>
                   </a:txBody>
@@ -41541,7 +41541,7 @@
                           </a:solidFill>
                           <a:latin typeface="Calibri"/>
                         </a:rPr>
-                        <a:t>Existing mobile app on the new server</a:t>
+                        <a:t>First request latency</a:t>
                       </a:r>
                     </a:p>
                   </a:txBody>
@@ -41563,7 +41563,7 @@
                           </a:solidFill>
                           <a:latin typeface="Calibri"/>
                         </a:rPr>
-                        <a:t>unchanged</a:t>
+                        <a:t>inference only</a:t>
                       </a:r>
                     </a:p>
                   </a:txBody>
@@ -41585,7 +41585,7 @@
                           </a:solidFill>
                           <a:latin typeface="Calibri"/>
                         </a:rPr>
-                        <a:t>pass — 80/99 smoke test, all 5 classes</a:t>
+                        <a:t>pass — every model warmed at startup</a:t>
                       </a:r>
                     </a:p>
                   </a:txBody>
@@ -41609,7 +41609,7 @@
                           </a:solidFill>
                           <a:latin typeface="Calibri"/>
                         </a:rPr>
-                        <a:t>First request latency</a:t>
+                        <a:t>One model bundle missing</a:t>
                       </a:r>
                     </a:p>
                   </a:txBody>
@@ -41631,7 +41631,7 @@
                           </a:solidFill>
                           <a:latin typeface="Calibri"/>
                         </a:rPr>
-                        <a:t>inference only</a:t>
+                        <a:t>others keep serving</a:t>
                       </a:r>
                     </a:p>
                   </a:txBody>
@@ -41653,7 +41653,7 @@
                           </a:solidFill>
                           <a:latin typeface="Calibri"/>
                         </a:rPr>
-                        <a:t>pass — models warmed at startup (1.3 s → 47 ms)</a:t>
+                        <a:t>pass — 503 for that model only</a:t>
                       </a:r>
                     </a:p>
                   </a:txBody>
@@ -44292,7 +44292,7 @@
                 </a:solidFill>
                 <a:latin typeface="Calibri"/>
               </a:rPr>
-              <a:t>▪  alarm and horn_skid are strong for every model since UrbanSound8K added ~5× more data</a:t>
+              <a:t>▪  alarm and horn_skid are strong for every model since UrbanSound8K added horn and siren recordings</a:t>
             </a:r>
           </a:p>
           <a:p>
